--- a/deliverables/sales_decks/Individuals_Deck.pptx
+++ b/deliverables/sales_decks/Individuals_Deck.pptx
@@ -18584,8 +18584,8 @@
         </p:nvSpPr>
         <p:spPr>
           <a:xfrm>
-            <a:off x="548640" y="2990088"/>
-            <a:ext cx="1005840" cy="3364992"/>
+            <a:off x="603504" y="3044952"/>
+            <a:ext cx="7205472" cy="3255264"/>
           </a:xfrm>
           <a:prstGeom prst="rect">
             <a:avLst/>
@@ -18593,10 +18593,8 @@
           <a:solidFill>
             <a:srgbClr val="0A0F1C"/>
           </a:solidFill>
-          <a:ln w="9525">
-            <a:solidFill>
-              <a:srgbClr val="2A3A5C"/>
-            </a:solidFill>
+          <a:ln>
+            <a:noFill/>
           </a:ln>
           <a:effectLst/>
         </p:spPr>
@@ -18622,405 +18620,33 @@
           </a:p>
         </p:txBody>
       </p:sp>
-      <p:sp>
-        <p:nvSpPr>
-          <p:cNvPr id="14" name="Rectangle 13"/>
-          <p:cNvSpPr/>
-          <p:nvPr/>
-        </p:nvSpPr>
-        <p:spPr>
-          <a:xfrm>
-            <a:off x="685800" y="3200400"/>
-            <a:ext cx="731520" cy="201168"/>
-          </a:xfrm>
-          <a:prstGeom prst="rect">
-            <a:avLst/>
-          </a:prstGeom>
-          <a:solidFill>
-            <a:srgbClr val="1E2C4A"/>
-          </a:solidFill>
-          <a:ln>
-            <a:noFill/>
-          </a:ln>
-          <a:effectLst/>
-        </p:spPr>
-        <p:style>
-          <a:lnRef idx="1">
-            <a:schemeClr val="accent1"/>
-          </a:lnRef>
-          <a:fillRef idx="3">
-            <a:schemeClr val="accent1"/>
-          </a:fillRef>
-          <a:effectRef idx="2">
-            <a:schemeClr val="accent1"/>
-          </a:effectRef>
-          <a:fontRef idx="minor">
-            <a:schemeClr val="lt1"/>
-          </a:fontRef>
-        </p:style>
-        <p:txBody>
-          <a:bodyPr rtlCol="0" anchor="ctr"/>
-          <a:lstStyle/>
-          <a:p>
-            <a:pPr algn="ctr"/>
-          </a:p>
-        </p:txBody>
-      </p:sp>
-      <p:sp>
-        <p:nvSpPr>
-          <p:cNvPr id="15" name="Rectangle 14"/>
-          <p:cNvSpPr/>
-          <p:nvPr/>
-        </p:nvSpPr>
-        <p:spPr>
-          <a:xfrm>
-            <a:off x="685800" y="3611880"/>
-            <a:ext cx="731520" cy="201168"/>
-          </a:xfrm>
-          <a:prstGeom prst="rect">
-            <a:avLst/>
-          </a:prstGeom>
-          <a:solidFill>
-            <a:srgbClr val="1E2C4A"/>
-          </a:solidFill>
-          <a:ln>
-            <a:noFill/>
-          </a:ln>
-          <a:effectLst/>
-        </p:spPr>
-        <p:style>
-          <a:lnRef idx="1">
-            <a:schemeClr val="accent1"/>
-          </a:lnRef>
-          <a:fillRef idx="3">
-            <a:schemeClr val="accent1"/>
-          </a:fillRef>
-          <a:effectRef idx="2">
-            <a:schemeClr val="accent1"/>
-          </a:effectRef>
-          <a:fontRef idx="minor">
-            <a:schemeClr val="lt1"/>
-          </a:fontRef>
-        </p:style>
-        <p:txBody>
-          <a:bodyPr rtlCol="0" anchor="ctr"/>
-          <a:lstStyle/>
-          <a:p>
-            <a:pPr algn="ctr"/>
-          </a:p>
-        </p:txBody>
-      </p:sp>
-      <p:sp>
-        <p:nvSpPr>
-          <p:cNvPr id="16" name="Rectangle 15"/>
-          <p:cNvSpPr/>
-          <p:nvPr/>
-        </p:nvSpPr>
-        <p:spPr>
-          <a:xfrm>
-            <a:off x="685800" y="4023360"/>
-            <a:ext cx="731520" cy="201168"/>
-          </a:xfrm>
-          <a:prstGeom prst="rect">
-            <a:avLst/>
-          </a:prstGeom>
-          <a:solidFill>
-            <a:srgbClr val="1E2C4A"/>
-          </a:solidFill>
-          <a:ln>
-            <a:noFill/>
-          </a:ln>
-          <a:effectLst/>
-        </p:spPr>
-        <p:style>
-          <a:lnRef idx="1">
-            <a:schemeClr val="accent1"/>
-          </a:lnRef>
-          <a:fillRef idx="3">
-            <a:schemeClr val="accent1"/>
-          </a:fillRef>
-          <a:effectRef idx="2">
-            <a:schemeClr val="accent1"/>
-          </a:effectRef>
-          <a:fontRef idx="minor">
-            <a:schemeClr val="lt1"/>
-          </a:fontRef>
-        </p:style>
-        <p:txBody>
-          <a:bodyPr rtlCol="0" anchor="ctr"/>
-          <a:lstStyle/>
-          <a:p>
-            <a:pPr algn="ctr"/>
-          </a:p>
-        </p:txBody>
-      </p:sp>
-      <p:sp>
-        <p:nvSpPr>
-          <p:cNvPr id="17" name="Rectangle 16"/>
-          <p:cNvSpPr/>
-          <p:nvPr/>
-        </p:nvSpPr>
-        <p:spPr>
-          <a:xfrm>
-            <a:off x="685800" y="4434840"/>
-            <a:ext cx="731520" cy="201168"/>
-          </a:xfrm>
-          <a:prstGeom prst="rect">
-            <a:avLst/>
-          </a:prstGeom>
-          <a:solidFill>
-            <a:srgbClr val="1E2C4A"/>
-          </a:solidFill>
-          <a:ln>
-            <a:noFill/>
-          </a:ln>
-          <a:effectLst/>
-        </p:spPr>
-        <p:style>
-          <a:lnRef idx="1">
-            <a:schemeClr val="accent1"/>
-          </a:lnRef>
-          <a:fillRef idx="3">
-            <a:schemeClr val="accent1"/>
-          </a:fillRef>
-          <a:effectRef idx="2">
-            <a:schemeClr val="accent1"/>
-          </a:effectRef>
-          <a:fontRef idx="minor">
-            <a:schemeClr val="lt1"/>
-          </a:fontRef>
-        </p:style>
-        <p:txBody>
-          <a:bodyPr rtlCol="0" anchor="ctr"/>
-          <a:lstStyle/>
-          <a:p>
-            <a:pPr algn="ctr"/>
-          </a:p>
-        </p:txBody>
-      </p:sp>
-      <p:sp>
-        <p:nvSpPr>
-          <p:cNvPr id="18" name="Rectangle 17"/>
-          <p:cNvSpPr/>
-          <p:nvPr/>
-        </p:nvSpPr>
-        <p:spPr>
-          <a:xfrm>
-            <a:off x="685800" y="4846320"/>
-            <a:ext cx="731520" cy="201168"/>
-          </a:xfrm>
-          <a:prstGeom prst="rect">
-            <a:avLst/>
-          </a:prstGeom>
-          <a:solidFill>
-            <a:srgbClr val="1E2C4A"/>
-          </a:solidFill>
-          <a:ln>
-            <a:noFill/>
-          </a:ln>
-          <a:effectLst/>
-        </p:spPr>
-        <p:style>
-          <a:lnRef idx="1">
-            <a:schemeClr val="accent1"/>
-          </a:lnRef>
-          <a:fillRef idx="3">
-            <a:schemeClr val="accent1"/>
-          </a:fillRef>
-          <a:effectRef idx="2">
-            <a:schemeClr val="accent1"/>
-          </a:effectRef>
-          <a:fontRef idx="minor">
-            <a:schemeClr val="lt1"/>
-          </a:fontRef>
-        </p:style>
-        <p:txBody>
-          <a:bodyPr rtlCol="0" anchor="ctr"/>
-          <a:lstStyle/>
-          <a:p>
-            <a:pPr algn="ctr"/>
-          </a:p>
-        </p:txBody>
-      </p:sp>
-      <p:sp>
-        <p:nvSpPr>
-          <p:cNvPr id="19" name="Rectangle 18"/>
-          <p:cNvSpPr/>
-          <p:nvPr/>
-        </p:nvSpPr>
-        <p:spPr>
-          <a:xfrm>
-            <a:off x="1783080" y="3154680"/>
-            <a:ext cx="5943600" cy="457200"/>
-          </a:xfrm>
-          <a:prstGeom prst="rect">
-            <a:avLst/>
-          </a:prstGeom>
-          <a:solidFill>
-            <a:srgbClr val="1E2C4A"/>
-          </a:solidFill>
-          <a:ln>
-            <a:noFill/>
-          </a:ln>
-          <a:effectLst/>
-        </p:spPr>
-        <p:style>
-          <a:lnRef idx="1">
-            <a:schemeClr val="accent1"/>
-          </a:lnRef>
-          <a:fillRef idx="3">
-            <a:schemeClr val="accent1"/>
-          </a:fillRef>
-          <a:effectRef idx="2">
-            <a:schemeClr val="accent1"/>
-          </a:effectRef>
-          <a:fontRef idx="minor">
-            <a:schemeClr val="lt1"/>
-          </a:fontRef>
-        </p:style>
-        <p:txBody>
-          <a:bodyPr rtlCol="0" anchor="ctr"/>
-          <a:lstStyle/>
-          <a:p>
-            <a:pPr algn="ctr"/>
-          </a:p>
-        </p:txBody>
-      </p:sp>
-      <p:sp>
-        <p:nvSpPr>
-          <p:cNvPr id="20" name="Rectangle 19"/>
-          <p:cNvSpPr/>
-          <p:nvPr/>
-        </p:nvSpPr>
-        <p:spPr>
-          <a:xfrm>
-            <a:off x="1783080" y="3749040"/>
-            <a:ext cx="2880360" cy="1097280"/>
-          </a:xfrm>
-          <a:prstGeom prst="rect">
-            <a:avLst/>
-          </a:prstGeom>
-          <a:solidFill>
-            <a:srgbClr val="1E2C4A"/>
-          </a:solidFill>
-          <a:ln>
-            <a:noFill/>
-          </a:ln>
-          <a:effectLst/>
-        </p:spPr>
-        <p:style>
-          <a:lnRef idx="1">
-            <a:schemeClr val="accent1"/>
-          </a:lnRef>
-          <a:fillRef idx="3">
-            <a:schemeClr val="accent1"/>
-          </a:fillRef>
-          <a:effectRef idx="2">
-            <a:schemeClr val="accent1"/>
-          </a:effectRef>
-          <a:fontRef idx="minor">
-            <a:schemeClr val="lt1"/>
-          </a:fontRef>
-        </p:style>
-        <p:txBody>
-          <a:bodyPr rtlCol="0" anchor="ctr"/>
-          <a:lstStyle/>
-          <a:p>
-            <a:pPr algn="ctr"/>
-          </a:p>
-        </p:txBody>
-      </p:sp>
-      <p:sp>
-        <p:nvSpPr>
-          <p:cNvPr id="21" name="Rectangle 20"/>
-          <p:cNvSpPr/>
-          <p:nvPr/>
-        </p:nvSpPr>
-        <p:spPr>
-          <a:xfrm>
-            <a:off x="4846320" y="3749040"/>
-            <a:ext cx="2880360" cy="1097280"/>
-          </a:xfrm>
-          <a:prstGeom prst="rect">
-            <a:avLst/>
-          </a:prstGeom>
-          <a:solidFill>
-            <a:srgbClr val="1E2C4A"/>
-          </a:solidFill>
-          <a:ln>
-            <a:noFill/>
-          </a:ln>
-          <a:effectLst/>
-        </p:spPr>
-        <p:style>
-          <a:lnRef idx="1">
-            <a:schemeClr val="accent1"/>
-          </a:lnRef>
-          <a:fillRef idx="3">
-            <a:schemeClr val="accent1"/>
-          </a:fillRef>
-          <a:effectRef idx="2">
-            <a:schemeClr val="accent1"/>
-          </a:effectRef>
-          <a:fontRef idx="minor">
-            <a:schemeClr val="lt1"/>
-          </a:fontRef>
-        </p:style>
-        <p:txBody>
-          <a:bodyPr rtlCol="0" anchor="ctr"/>
-          <a:lstStyle/>
-          <a:p>
-            <a:pPr algn="ctr"/>
-          </a:p>
-        </p:txBody>
-      </p:sp>
-      <p:sp>
-        <p:nvSpPr>
-          <p:cNvPr id="22" name="Rectangle 21"/>
-          <p:cNvSpPr/>
-          <p:nvPr/>
-        </p:nvSpPr>
-        <p:spPr>
-          <a:xfrm>
-            <a:off x="1783080" y="4983480"/>
-            <a:ext cx="5943600" cy="1188720"/>
-          </a:xfrm>
-          <a:prstGeom prst="rect">
-            <a:avLst/>
-          </a:prstGeom>
-          <a:solidFill>
-            <a:srgbClr val="1E2C4A"/>
-          </a:solidFill>
-          <a:ln>
-            <a:noFill/>
-          </a:ln>
-          <a:effectLst/>
-        </p:spPr>
-        <p:style>
-          <a:lnRef idx="1">
-            <a:schemeClr val="accent1"/>
-          </a:lnRef>
-          <a:fillRef idx="3">
-            <a:schemeClr val="accent1"/>
-          </a:fillRef>
-          <a:effectRef idx="2">
-            <a:schemeClr val="accent1"/>
-          </a:effectRef>
-          <a:fontRef idx="minor">
-            <a:schemeClr val="lt1"/>
-          </a:fontRef>
-        </p:style>
-        <p:txBody>
-          <a:bodyPr rtlCol="0" anchor="ctr"/>
-          <a:lstStyle/>
-          <a:p>
-            <a:pPr algn="ctr"/>
-          </a:p>
-        </p:txBody>
-      </p:sp>
-      <p:sp>
-        <p:nvSpPr>
-          <p:cNvPr id="23" name="TextBox 22"/>
+      <p:pic>
+        <p:nvPicPr>
+          <p:cNvPr id="14" name="Picture 13" descr="Dashboard_users_1771832454665_7205472x3255264_1771832447.png"/>
+          <p:cNvPicPr>
+            <a:picLocks noChangeAspect="1"/>
+          </p:cNvPicPr>
+          <p:nvPr/>
+        </p:nvPicPr>
+        <p:blipFill>
+          <a:blip r:embed="rId2"/>
+          <a:stretch>
+            <a:fillRect/>
+          </a:stretch>
+        </p:blipFill>
+        <p:spPr>
+          <a:xfrm>
+            <a:off x="603504" y="3044952"/>
+            <a:ext cx="7205472" cy="3255264"/>
+          </a:xfrm>
+          <a:prstGeom prst="rect">
+            <a:avLst/>
+          </a:prstGeom>
+        </p:spPr>
+      </p:pic>
+      <p:sp>
+        <p:nvSpPr>
+          <p:cNvPr id="15" name="TextBox 14"/>
           <p:cNvSpPr txBox="1"/>
           <p:nvPr/>
         </p:nvSpPr>
@@ -19052,14 +18678,14 @@
                 </a:solidFill>
                 <a:latin typeface="Inter"/>
               </a:rPr>
-              <a:t>Dashboard view  ·  replace with real product screenshot</a:t>
-            </a:r>
-          </a:p>
-        </p:txBody>
-      </p:sp>
-      <p:sp>
-        <p:nvSpPr>
-          <p:cNvPr id="24" name="TextBox 23"/>
+              <a:t>Dashboard  ·  live product view</a:t>
+            </a:r>
+          </a:p>
+        </p:txBody>
+      </p:sp>
+      <p:sp>
+        <p:nvSpPr>
+          <p:cNvPr id="16" name="TextBox 15"/>
           <p:cNvSpPr txBox="1"/>
           <p:nvPr/>
         </p:nvSpPr>
@@ -19219,7 +18845,7 @@
       </p:sp>
       <p:sp>
         <p:nvSpPr>
-          <p:cNvPr id="25" name="TextBox 24"/>
+          <p:cNvPr id="17" name="TextBox 16"/>
           <p:cNvSpPr txBox="1"/>
           <p:nvPr/>
         </p:nvSpPr>
@@ -19258,7 +18884,7 @@
       </p:sp>
       <p:sp>
         <p:nvSpPr>
-          <p:cNvPr id="26" name="TextBox 25"/>
+          <p:cNvPr id="18" name="TextBox 17"/>
           <p:cNvSpPr txBox="1"/>
           <p:nvPr/>
         </p:nvSpPr>

--- a/deliverables/sales_decks/Individuals_Deck.pptx
+++ b/deliverables/sales_decks/Individuals_Deck.pptx
@@ -3866,7 +3866,7 @@
                 </a:solidFill>
                 <a:latin typeface="Inter"/>
               </a:rPr>
-              <a:t>09  ·  PRICING FRAMING</a:t>
+              <a:t>09  ·  PRICING</a:t>
             </a:r>
           </a:p>
         </p:txBody>
@@ -3905,7 +3905,7 @@
                 </a:solidFill>
                 <a:latin typeface="Inter"/>
               </a:rPr>
-              <a:t>One roster. One simple price. Built to pay for itself.</a:t>
+              <a:t>One price per roster. Pick the plan that matches your game.</a:t>
             </a:r>
           </a:p>
         </p:txBody>
@@ -4008,7 +4008,85 @@
         </p:nvSpPr>
         <p:spPr>
           <a:xfrm>
-            <a:off x="822960" y="2926080"/>
+            <a:off x="822960" y="2880360"/>
+            <a:ext cx="3108960" cy="411480"/>
+          </a:xfrm>
+          <a:prstGeom prst="rect">
+            <a:avLst/>
+          </a:prstGeom>
+          <a:noFill/>
+        </p:spPr>
+        <p:txBody>
+          <a:bodyPr wrap="square" lIns="0" rIns="0" tIns="0" bIns="0" anchor="t">
+            <a:spAutoFit/>
+          </a:bodyPr>
+          <a:lstStyle/>
+          <a:p>
+            <a:pPr algn="l">
+              <a:lnSpc>
+                <a:spcPct val="115000"/>
+              </a:lnSpc>
+            </a:pPr>
+            <a:r>
+              <a:rPr sz="1600" b="1">
+                <a:solidFill>
+                  <a:srgbClr val="E7ECF5"/>
+                </a:solidFill>
+                <a:latin typeface="Inter"/>
+              </a:rPr>
+              <a:t>Lite</a:t>
+            </a:r>
+          </a:p>
+        </p:txBody>
+      </p:sp>
+      <p:sp>
+        <p:nvSpPr>
+          <p:cNvPr id="10" name="TextBox 9"/>
+          <p:cNvSpPr txBox="1"/>
+          <p:nvPr/>
+        </p:nvSpPr>
+        <p:spPr>
+          <a:xfrm>
+            <a:off x="822960" y="3291840"/>
+            <a:ext cx="3108960" cy="640080"/>
+          </a:xfrm>
+          <a:prstGeom prst="rect">
+            <a:avLst/>
+          </a:prstGeom>
+          <a:noFill/>
+        </p:spPr>
+        <p:txBody>
+          <a:bodyPr wrap="square" lIns="0" rIns="0" tIns="0" bIns="0" anchor="t">
+            <a:spAutoFit/>
+          </a:bodyPr>
+          <a:lstStyle/>
+          <a:p>
+            <a:pPr algn="l">
+              <a:lnSpc>
+                <a:spcPct val="120000"/>
+              </a:lnSpc>
+            </a:pPr>
+            <a:r>
+              <a:rPr sz="900" b="0">
+                <a:solidFill>
+                  <a:srgbClr val="9AA6C0"/>
+                </a:solidFill>
+                <a:latin typeface="Inter"/>
+              </a:rPr>
+              <a:t>Free Fire, Fortnite, Apex, PUBG, EAFC, Rocket League, eFootball, Deadlock, TrackMania, fighting games</a:t>
+            </a:r>
+          </a:p>
+        </p:txBody>
+      </p:sp>
+      <p:sp>
+        <p:nvSpPr>
+          <p:cNvPr id="11" name="TextBox 10"/>
+          <p:cNvSpPr txBox="1"/>
+          <p:nvPr/>
+        </p:nvSpPr>
+        <p:spPr>
+          <a:xfrm>
+            <a:off x="822960" y="3977639"/>
             <a:ext cx="3108960" cy="457200"/>
           </a:xfrm>
           <a:prstGeom prst="rect">
@@ -4028,178 +4106,61 @@
               </a:lnSpc>
             </a:pPr>
             <a:r>
-              <a:rPr sz="1600" b="1">
+              <a:rPr sz="1800" b="1">
                 <a:solidFill>
                   <a:srgbClr val="E7ECF5"/>
                 </a:solidFill>
                 <a:latin typeface="Inter"/>
               </a:rPr>
-              <a:t>Single Roster</a:t>
-            </a:r>
-          </a:p>
-        </p:txBody>
-      </p:sp>
-      <p:sp>
-        <p:nvSpPr>
-          <p:cNvPr id="10" name="TextBox 9"/>
-          <p:cNvSpPr txBox="1"/>
-          <p:nvPr/>
-        </p:nvSpPr>
-        <p:spPr>
-          <a:xfrm>
-            <a:off x="822960" y="3383280"/>
-            <a:ext cx="3108960" cy="365760"/>
-          </a:xfrm>
-          <a:prstGeom prst="rect">
-            <a:avLst/>
-          </a:prstGeom>
-          <a:noFill/>
-        </p:spPr>
-        <p:txBody>
-          <a:bodyPr wrap="square" lIns="0" rIns="0" tIns="0" bIns="0" anchor="t">
+              <a:t>$8 USD / month per roster</a:t>
+            </a:r>
+          </a:p>
+        </p:txBody>
+      </p:sp>
+      <p:sp>
+        <p:nvSpPr>
+          <p:cNvPr id="12" name="TextBox 11"/>
+          <p:cNvSpPr txBox="1"/>
+          <p:nvPr/>
+        </p:nvSpPr>
+        <p:spPr>
+          <a:xfrm>
+            <a:off x="822960" y="4526280"/>
+            <a:ext cx="3108960" cy="1828800"/>
+          </a:xfrm>
+          <a:prstGeom prst="rect">
+            <a:avLst/>
+          </a:prstGeom>
+          <a:noFill/>
+        </p:spPr>
+        <p:txBody>
+          <a:bodyPr wrap="square" lIns="0" rIns="0" tIns="0" bIns="0">
             <a:spAutoFit/>
           </a:bodyPr>
           <a:lstStyle/>
           <a:p>
             <a:pPr algn="l">
               <a:lnSpc>
-                <a:spcPct val="115000"/>
-              </a:lnSpc>
-            </a:pPr>
-            <a:r>
-              <a:rPr sz="1000" b="0">
-                <a:solidFill>
-                  <a:srgbClr val="9AA6C0"/>
-                </a:solidFill>
-                <a:latin typeface="Inter"/>
-              </a:rPr>
-              <a:t>Best for solo competitive players</a:t>
-            </a:r>
-          </a:p>
-        </p:txBody>
-      </p:sp>
-      <p:sp>
-        <p:nvSpPr>
-          <p:cNvPr id="11" name="TextBox 10"/>
-          <p:cNvSpPr txBox="1"/>
-          <p:nvPr/>
-        </p:nvSpPr>
-        <p:spPr>
-          <a:xfrm>
-            <a:off x="822960" y="3886200"/>
-            <a:ext cx="3108960" cy="548640"/>
-          </a:xfrm>
-          <a:prstGeom prst="rect">
-            <a:avLst/>
-          </a:prstGeom>
-          <a:noFill/>
-        </p:spPr>
-        <p:txBody>
-          <a:bodyPr wrap="square" lIns="0" rIns="0" tIns="0" bIns="0" anchor="t">
-            <a:spAutoFit/>
-          </a:bodyPr>
-          <a:lstStyle/>
-          <a:p>
-            <a:pPr algn="l">
-              <a:lnSpc>
-                <a:spcPct val="115000"/>
-              </a:lnSpc>
-            </a:pPr>
-            <a:r>
-              <a:rPr sz="2200" b="1">
+                <a:spcPct val="135000"/>
+              </a:lnSpc>
+            </a:pPr>
+            <a:r>
+              <a:rPr sz="1000" b="1">
+                <a:solidFill>
+                  <a:srgbClr val="1FA8E0"/>
+                </a:solidFill>
+                <a:latin typeface="Inter"/>
+              </a:rPr>
+              <a:t>▸  </a:t>
+            </a:r>
+            <a:r>
+              <a:rPr sz="1000">
                 <a:solidFill>
                   <a:srgbClr val="E7ECF5"/>
                 </a:solidFill>
                 <a:latin typeface="Inter"/>
               </a:rPr>
-              <a:t>$ —  / month</a:t>
-            </a:r>
-          </a:p>
-        </p:txBody>
-      </p:sp>
-      <p:sp>
-        <p:nvSpPr>
-          <p:cNvPr id="12" name="TextBox 11"/>
-          <p:cNvSpPr txBox="1"/>
-          <p:nvPr/>
-        </p:nvSpPr>
-        <p:spPr>
-          <a:xfrm>
-            <a:off x="822960" y="4434840"/>
-            <a:ext cx="3108960" cy="274320"/>
-          </a:xfrm>
-          <a:prstGeom prst="rect">
-            <a:avLst/>
-          </a:prstGeom>
-          <a:noFill/>
-        </p:spPr>
-        <p:txBody>
-          <a:bodyPr wrap="square" lIns="0" rIns="0" tIns="0" bIns="0" anchor="t">
-            <a:spAutoFit/>
-          </a:bodyPr>
-          <a:lstStyle/>
-          <a:p>
-            <a:pPr algn="l">
-              <a:lnSpc>
-                <a:spcPct val="115000"/>
-              </a:lnSpc>
-            </a:pPr>
-            <a:r>
-              <a:rPr sz="900" b="0">
-                <a:solidFill>
-                  <a:srgbClr val="6A7895"/>
-                </a:solidFill>
-                <a:latin typeface="Inter"/>
-              </a:rPr>
-              <a:t>edit price in Canva</a:t>
-            </a:r>
-          </a:p>
-        </p:txBody>
-      </p:sp>
-      <p:sp>
-        <p:nvSpPr>
-          <p:cNvPr id="13" name="TextBox 12"/>
-          <p:cNvSpPr txBox="1"/>
-          <p:nvPr/>
-        </p:nvSpPr>
-        <p:spPr>
-          <a:xfrm>
-            <a:off x="822960" y="4800600"/>
-            <a:ext cx="3108960" cy="1554480"/>
-          </a:xfrm>
-          <a:prstGeom prst="rect">
-            <a:avLst/>
-          </a:prstGeom>
-          <a:noFill/>
-        </p:spPr>
-        <p:txBody>
-          <a:bodyPr wrap="square" lIns="0" rIns="0" tIns="0" bIns="0">
-            <a:spAutoFit/>
-          </a:bodyPr>
-          <a:lstStyle/>
-          <a:p>
-            <a:pPr algn="l">
-              <a:lnSpc>
-                <a:spcPct val="135000"/>
-              </a:lnSpc>
-            </a:pPr>
-            <a:r>
-              <a:rPr sz="1000" b="1">
-                <a:solidFill>
-                  <a:srgbClr val="1FA8E0"/>
-                </a:solidFill>
-                <a:latin typeface="Inter"/>
-              </a:rPr>
-              <a:t>▸  </a:t>
-            </a:r>
-            <a:r>
-              <a:rPr sz="1000">
-                <a:solidFill>
-                  <a:srgbClr val="E7ECF5"/>
-                </a:solidFill>
-                <a:latin typeface="Inter"/>
-              </a:rPr>
-              <a:t>1 roster</a:t>
+              <a:t>3 months: $18  (save 25%)</a:t>
             </a:r>
           </a:p>
           <a:p>
@@ -4227,7 +4188,7 @@
                 </a:solidFill>
                 <a:latin typeface="Inter"/>
               </a:rPr>
-              <a:t>All features included</a:t>
+              <a:t>6 months: $31  (save 35%)</a:t>
             </a:r>
           </a:p>
           <a:p>
@@ -4255,7 +4216,7 @@
                 </a:solidFill>
                 <a:latin typeface="Inter"/>
               </a:rPr>
-              <a:t>Unlimited matches</a:t>
+              <a:t>All features included</a:t>
             </a:r>
           </a:p>
           <a:p>
@@ -4290,7 +4251,7 @@
       </p:sp>
       <p:sp>
         <p:nvSpPr>
-          <p:cNvPr id="14" name="Rectangle 13"/>
+          <p:cNvPr id="13" name="Rectangle 12"/>
           <p:cNvSpPr/>
           <p:nvPr/>
         </p:nvSpPr>
@@ -4336,7 +4297,7 @@
       </p:sp>
       <p:sp>
         <p:nvSpPr>
-          <p:cNvPr id="15" name="Rounded Rectangle 14"/>
+          <p:cNvPr id="14" name="Rounded Rectangle 13"/>
           <p:cNvSpPr/>
           <p:nvPr/>
         </p:nvSpPr>
@@ -4380,7 +4341,7 @@
       </p:sp>
       <p:sp>
         <p:nvSpPr>
-          <p:cNvPr id="16" name="TextBox 15"/>
+          <p:cNvPr id="15" name="TextBox 14"/>
           <p:cNvSpPr txBox="1"/>
           <p:nvPr/>
         </p:nvSpPr>
@@ -4419,13 +4380,91 @@
       </p:sp>
       <p:sp>
         <p:nvSpPr>
+          <p:cNvPr id="16" name="TextBox 15"/>
+          <p:cNvSpPr txBox="1"/>
+          <p:nvPr/>
+        </p:nvSpPr>
+        <p:spPr>
+          <a:xfrm>
+            <a:off x="4617720" y="2880360"/>
+            <a:ext cx="3108960" cy="411480"/>
+          </a:xfrm>
+          <a:prstGeom prst="rect">
+            <a:avLst/>
+          </a:prstGeom>
+          <a:noFill/>
+        </p:spPr>
+        <p:txBody>
+          <a:bodyPr wrap="square" lIns="0" rIns="0" tIns="0" bIns="0" anchor="t">
+            <a:spAutoFit/>
+          </a:bodyPr>
+          <a:lstStyle/>
+          <a:p>
+            <a:pPr algn="l">
+              <a:lnSpc>
+                <a:spcPct val="115000"/>
+              </a:lnSpc>
+            </a:pPr>
+            <a:r>
+              <a:rPr sz="1600" b="1">
+                <a:solidFill>
+                  <a:srgbClr val="E7ECF5"/>
+                </a:solidFill>
+                <a:latin typeface="Inter"/>
+              </a:rPr>
+              <a:t>Standard</a:t>
+            </a:r>
+          </a:p>
+        </p:txBody>
+      </p:sp>
+      <p:sp>
+        <p:nvSpPr>
           <p:cNvPr id="17" name="TextBox 16"/>
           <p:cNvSpPr txBox="1"/>
           <p:nvPr/>
         </p:nvSpPr>
         <p:spPr>
           <a:xfrm>
-            <a:off x="4617720" y="2926080"/>
+            <a:off x="4617720" y="3291840"/>
+            <a:ext cx="3108960" cy="640080"/>
+          </a:xfrm>
+          <a:prstGeom prst="rect">
+            <a:avLst/>
+          </a:prstGeom>
+          <a:noFill/>
+        </p:spPr>
+        <p:txBody>
+          <a:bodyPr wrap="square" lIns="0" rIns="0" tIns="0" bIns="0" anchor="t">
+            <a:spAutoFit/>
+          </a:bodyPr>
+          <a:lstStyle/>
+          <a:p>
+            <a:pPr algn="l">
+              <a:lnSpc>
+                <a:spcPct val="120000"/>
+              </a:lnSpc>
+            </a:pPr>
+            <a:r>
+              <a:rPr sz="900" b="0">
+                <a:solidFill>
+                  <a:srgbClr val="9AA6C0"/>
+                </a:solidFill>
+                <a:latin typeface="Inter"/>
+              </a:rPr>
+              <a:t>Dota 2, CS:GO, LoL, Mobile Legends, Honor of Kings, TFT, CrossFire, CoD Mobile, The Finals, Brawl Stars</a:t>
+            </a:r>
+          </a:p>
+        </p:txBody>
+      </p:sp>
+      <p:sp>
+        <p:nvSpPr>
+          <p:cNvPr id="18" name="TextBox 17"/>
+          <p:cNvSpPr txBox="1"/>
+          <p:nvPr/>
+        </p:nvSpPr>
+        <p:spPr>
+          <a:xfrm>
+            <a:off x="4617720" y="3977639"/>
             <a:ext cx="3108960" cy="457200"/>
           </a:xfrm>
           <a:prstGeom prst="rect">
@@ -4445,178 +4484,61 @@
               </a:lnSpc>
             </a:pPr>
             <a:r>
-              <a:rPr sz="1600" b="1">
+              <a:rPr sz="1800" b="1">
+                <a:solidFill>
+                  <a:srgbClr val="1FA8E0"/>
+                </a:solidFill>
+                <a:latin typeface="Inter"/>
+              </a:rPr>
+              <a:t>$20 USD / month per roster</a:t>
+            </a:r>
+          </a:p>
+        </p:txBody>
+      </p:sp>
+      <p:sp>
+        <p:nvSpPr>
+          <p:cNvPr id="19" name="TextBox 18"/>
+          <p:cNvSpPr txBox="1"/>
+          <p:nvPr/>
+        </p:nvSpPr>
+        <p:spPr>
+          <a:xfrm>
+            <a:off x="4617720" y="4526280"/>
+            <a:ext cx="3108960" cy="1828800"/>
+          </a:xfrm>
+          <a:prstGeom prst="rect">
+            <a:avLst/>
+          </a:prstGeom>
+          <a:noFill/>
+        </p:spPr>
+        <p:txBody>
+          <a:bodyPr wrap="square" lIns="0" rIns="0" tIns="0" bIns="0">
+            <a:spAutoFit/>
+          </a:bodyPr>
+          <a:lstStyle/>
+          <a:p>
+            <a:pPr algn="l">
+              <a:lnSpc>
+                <a:spcPct val="135000"/>
+              </a:lnSpc>
+            </a:pPr>
+            <a:r>
+              <a:rPr sz="1000" b="1">
+                <a:solidFill>
+                  <a:srgbClr val="1FA8E0"/>
+                </a:solidFill>
+                <a:latin typeface="Inter"/>
+              </a:rPr>
+              <a:t>▸  </a:t>
+            </a:r>
+            <a:r>
+              <a:rPr sz="1000">
                 <a:solidFill>
                   <a:srgbClr val="E7ECF5"/>
                 </a:solidFill>
                 <a:latin typeface="Inter"/>
               </a:rPr>
-              <a:t>Single Roster + Coach</a:t>
-            </a:r>
-          </a:p>
-        </p:txBody>
-      </p:sp>
-      <p:sp>
-        <p:nvSpPr>
-          <p:cNvPr id="18" name="TextBox 17"/>
-          <p:cNvSpPr txBox="1"/>
-          <p:nvPr/>
-        </p:nvSpPr>
-        <p:spPr>
-          <a:xfrm>
-            <a:off x="4617720" y="3383280"/>
-            <a:ext cx="3108960" cy="365760"/>
-          </a:xfrm>
-          <a:prstGeom prst="rect">
-            <a:avLst/>
-          </a:prstGeom>
-          <a:noFill/>
-        </p:spPr>
-        <p:txBody>
-          <a:bodyPr wrap="square" lIns="0" rIns="0" tIns="0" bIns="0" anchor="t">
-            <a:spAutoFit/>
-          </a:bodyPr>
-          <a:lstStyle/>
-          <a:p>
-            <a:pPr algn="l">
-              <a:lnSpc>
-                <a:spcPct val="115000"/>
-              </a:lnSpc>
-            </a:pPr>
-            <a:r>
-              <a:rPr sz="1000" b="0">
-                <a:solidFill>
-                  <a:srgbClr val="9AA6C0"/>
-                </a:solidFill>
-                <a:latin typeface="Inter"/>
-              </a:rPr>
-              <a:t>For player-coach duos</a:t>
-            </a:r>
-          </a:p>
-        </p:txBody>
-      </p:sp>
-      <p:sp>
-        <p:nvSpPr>
-          <p:cNvPr id="19" name="TextBox 18"/>
-          <p:cNvSpPr txBox="1"/>
-          <p:nvPr/>
-        </p:nvSpPr>
-        <p:spPr>
-          <a:xfrm>
-            <a:off x="4617720" y="3886200"/>
-            <a:ext cx="3108960" cy="548640"/>
-          </a:xfrm>
-          <a:prstGeom prst="rect">
-            <a:avLst/>
-          </a:prstGeom>
-          <a:noFill/>
-        </p:spPr>
-        <p:txBody>
-          <a:bodyPr wrap="square" lIns="0" rIns="0" tIns="0" bIns="0" anchor="t">
-            <a:spAutoFit/>
-          </a:bodyPr>
-          <a:lstStyle/>
-          <a:p>
-            <a:pPr algn="l">
-              <a:lnSpc>
-                <a:spcPct val="115000"/>
-              </a:lnSpc>
-            </a:pPr>
-            <a:r>
-              <a:rPr sz="2200" b="1">
-                <a:solidFill>
-                  <a:srgbClr val="1FA8E0"/>
-                </a:solidFill>
-                <a:latin typeface="Inter"/>
-              </a:rPr>
-              <a:t>$ —  / month</a:t>
-            </a:r>
-          </a:p>
-        </p:txBody>
-      </p:sp>
-      <p:sp>
-        <p:nvSpPr>
-          <p:cNvPr id="20" name="TextBox 19"/>
-          <p:cNvSpPr txBox="1"/>
-          <p:nvPr/>
-        </p:nvSpPr>
-        <p:spPr>
-          <a:xfrm>
-            <a:off x="4617720" y="4434840"/>
-            <a:ext cx="3108960" cy="274320"/>
-          </a:xfrm>
-          <a:prstGeom prst="rect">
-            <a:avLst/>
-          </a:prstGeom>
-          <a:noFill/>
-        </p:spPr>
-        <p:txBody>
-          <a:bodyPr wrap="square" lIns="0" rIns="0" tIns="0" bIns="0" anchor="t">
-            <a:spAutoFit/>
-          </a:bodyPr>
-          <a:lstStyle/>
-          <a:p>
-            <a:pPr algn="l">
-              <a:lnSpc>
-                <a:spcPct val="115000"/>
-              </a:lnSpc>
-            </a:pPr>
-            <a:r>
-              <a:rPr sz="900" b="0">
-                <a:solidFill>
-                  <a:srgbClr val="6A7895"/>
-                </a:solidFill>
-                <a:latin typeface="Inter"/>
-              </a:rPr>
-              <a:t>edit price in Canva</a:t>
-            </a:r>
-          </a:p>
-        </p:txBody>
-      </p:sp>
-      <p:sp>
-        <p:nvSpPr>
-          <p:cNvPr id="21" name="TextBox 20"/>
-          <p:cNvSpPr txBox="1"/>
-          <p:nvPr/>
-        </p:nvSpPr>
-        <p:spPr>
-          <a:xfrm>
-            <a:off x="4617720" y="4800600"/>
-            <a:ext cx="3108960" cy="1554480"/>
-          </a:xfrm>
-          <a:prstGeom prst="rect">
-            <a:avLst/>
-          </a:prstGeom>
-          <a:noFill/>
-        </p:spPr>
-        <p:txBody>
-          <a:bodyPr wrap="square" lIns="0" rIns="0" tIns="0" bIns="0">
-            <a:spAutoFit/>
-          </a:bodyPr>
-          <a:lstStyle/>
-          <a:p>
-            <a:pPr algn="l">
-              <a:lnSpc>
-                <a:spcPct val="135000"/>
-              </a:lnSpc>
-            </a:pPr>
-            <a:r>
-              <a:rPr sz="1000" b="1">
-                <a:solidFill>
-                  <a:srgbClr val="1FA8E0"/>
-                </a:solidFill>
-                <a:latin typeface="Inter"/>
-              </a:rPr>
-              <a:t>▸  </a:t>
-            </a:r>
-            <a:r>
-              <a:rPr sz="1000">
-                <a:solidFill>
-                  <a:srgbClr val="E7ECF5"/>
-                </a:solidFill>
-                <a:latin typeface="Inter"/>
-              </a:rPr>
-              <a:t>Everything in Single</a:t>
+              <a:t>3 months: $45  (save 25%)</a:t>
             </a:r>
           </a:p>
           <a:p>
@@ -4644,7 +4566,7 @@
                 </a:solidFill>
                 <a:latin typeface="Inter"/>
               </a:rPr>
-              <a:t>Shared access for 1 coach</a:t>
+              <a:t>6 months: $78  (save 35%)</a:t>
             </a:r>
           </a:p>
           <a:p>
@@ -4672,7 +4594,7 @@
                 </a:solidFill>
                 <a:latin typeface="Inter"/>
               </a:rPr>
-              <a:t>Notes &amp; VOD links</a:t>
+              <a:t>All features included</a:t>
             </a:r>
           </a:p>
           <a:p>
@@ -4700,14 +4622,14 @@
                 </a:solidFill>
                 <a:latin typeface="Inter"/>
               </a:rPr>
-              <a:t>Priority email support</a:t>
-            </a:r>
-          </a:p>
-        </p:txBody>
-      </p:sp>
-      <p:sp>
-        <p:nvSpPr>
-          <p:cNvPr id="22" name="Rectangle 21"/>
+              <a:t>Cancel anytime</a:t>
+            </a:r>
+          </a:p>
+        </p:txBody>
+      </p:sp>
+      <p:sp>
+        <p:nvSpPr>
+          <p:cNvPr id="20" name="Rectangle 19"/>
           <p:cNvSpPr/>
           <p:nvPr/>
         </p:nvSpPr>
@@ -4753,13 +4675,91 @@
       </p:sp>
       <p:sp>
         <p:nvSpPr>
+          <p:cNvPr id="21" name="TextBox 20"/>
+          <p:cNvSpPr txBox="1"/>
+          <p:nvPr/>
+        </p:nvSpPr>
+        <p:spPr>
+          <a:xfrm>
+            <a:off x="8412480" y="2880360"/>
+            <a:ext cx="3108960" cy="411480"/>
+          </a:xfrm>
+          <a:prstGeom prst="rect">
+            <a:avLst/>
+          </a:prstGeom>
+          <a:noFill/>
+        </p:spPr>
+        <p:txBody>
+          <a:bodyPr wrap="square" lIns="0" rIns="0" tIns="0" bIns="0" anchor="t">
+            <a:spAutoFit/>
+          </a:bodyPr>
+          <a:lstStyle/>
+          <a:p>
+            <a:pPr algn="l">
+              <a:lnSpc>
+                <a:spcPct val="115000"/>
+              </a:lnSpc>
+            </a:pPr>
+            <a:r>
+              <a:rPr sz="1600" b="1">
+                <a:solidFill>
+                  <a:srgbClr val="E7ECF5"/>
+                </a:solidFill>
+                <a:latin typeface="Inter"/>
+              </a:rPr>
+              <a:t>Premium</a:t>
+            </a:r>
+          </a:p>
+        </p:txBody>
+      </p:sp>
+      <p:sp>
+        <p:nvSpPr>
+          <p:cNvPr id="22" name="TextBox 21"/>
+          <p:cNvSpPr txBox="1"/>
+          <p:nvPr/>
+        </p:nvSpPr>
+        <p:spPr>
+          <a:xfrm>
+            <a:off x="8412480" y="3291840"/>
+            <a:ext cx="3108960" cy="640080"/>
+          </a:xfrm>
+          <a:prstGeom prst="rect">
+            <a:avLst/>
+          </a:prstGeom>
+          <a:noFill/>
+        </p:spPr>
+        <p:txBody>
+          <a:bodyPr wrap="square" lIns="0" rIns="0" tIns="0" bIns="0" anchor="t">
+            <a:spAutoFit/>
+          </a:bodyPr>
+          <a:lstStyle/>
+          <a:p>
+            <a:pPr algn="l">
+              <a:lnSpc>
+                <a:spcPct val="120000"/>
+              </a:lnSpc>
+            </a:pPr>
+            <a:r>
+              <a:rPr sz="900" b="0">
+                <a:solidFill>
+                  <a:srgbClr val="9AA6C0"/>
+                </a:solidFill>
+                <a:latin typeface="Inter"/>
+              </a:rPr>
+              <a:t>Valorant, Overwatch, Rainbow Six Siege, Call of Duty, Marvel Rivals</a:t>
+            </a:r>
+          </a:p>
+        </p:txBody>
+      </p:sp>
+      <p:sp>
+        <p:nvSpPr>
           <p:cNvPr id="23" name="TextBox 22"/>
           <p:cNvSpPr txBox="1"/>
           <p:nvPr/>
         </p:nvSpPr>
         <p:spPr>
           <a:xfrm>
-            <a:off x="8412480" y="2926080"/>
+            <a:off x="8412480" y="3977639"/>
             <a:ext cx="3108960" cy="457200"/>
           </a:xfrm>
           <a:prstGeom prst="rect">
@@ -4779,13 +4779,13 @@
               </a:lnSpc>
             </a:pPr>
             <a:r>
-              <a:rPr sz="1600" b="1">
+              <a:rPr sz="1800" b="1">
                 <a:solidFill>
                   <a:srgbClr val="E7ECF5"/>
                 </a:solidFill>
                 <a:latin typeface="Inter"/>
               </a:rPr>
-              <a:t>Season Pass</a:t>
+              <a:t>$40 USD / month per roster</a:t>
             </a:r>
           </a:p>
         </p:txBody>
@@ -4798,159 +4798,42 @@
         </p:nvSpPr>
         <p:spPr>
           <a:xfrm>
-            <a:off x="8412480" y="3383280"/>
-            <a:ext cx="3108960" cy="365760"/>
-          </a:xfrm>
-          <a:prstGeom prst="rect">
-            <a:avLst/>
-          </a:prstGeom>
-          <a:noFill/>
-        </p:spPr>
-        <p:txBody>
-          <a:bodyPr wrap="square" lIns="0" rIns="0" tIns="0" bIns="0" anchor="t">
+            <a:off x="8412480" y="4526280"/>
+            <a:ext cx="3108960" cy="1828800"/>
+          </a:xfrm>
+          <a:prstGeom prst="rect">
+            <a:avLst/>
+          </a:prstGeom>
+          <a:noFill/>
+        </p:spPr>
+        <p:txBody>
+          <a:bodyPr wrap="square" lIns="0" rIns="0" tIns="0" bIns="0">
             <a:spAutoFit/>
           </a:bodyPr>
           <a:lstStyle/>
           <a:p>
             <a:pPr algn="l">
               <a:lnSpc>
-                <a:spcPct val="115000"/>
-              </a:lnSpc>
-            </a:pPr>
-            <a:r>
-              <a:rPr sz="1000" b="0">
-                <a:solidFill>
-                  <a:srgbClr val="9AA6C0"/>
-                </a:solidFill>
-                <a:latin typeface="Inter"/>
-              </a:rPr>
-              <a:t>Pay for the season, not the month</a:t>
-            </a:r>
-          </a:p>
-        </p:txBody>
-      </p:sp>
-      <p:sp>
-        <p:nvSpPr>
-          <p:cNvPr id="25" name="TextBox 24"/>
-          <p:cNvSpPr txBox="1"/>
-          <p:nvPr/>
-        </p:nvSpPr>
-        <p:spPr>
-          <a:xfrm>
-            <a:off x="8412480" y="3886200"/>
-            <a:ext cx="3108960" cy="548640"/>
-          </a:xfrm>
-          <a:prstGeom prst="rect">
-            <a:avLst/>
-          </a:prstGeom>
-          <a:noFill/>
-        </p:spPr>
-        <p:txBody>
-          <a:bodyPr wrap="square" lIns="0" rIns="0" tIns="0" bIns="0" anchor="t">
-            <a:spAutoFit/>
-          </a:bodyPr>
-          <a:lstStyle/>
-          <a:p>
-            <a:pPr algn="l">
-              <a:lnSpc>
-                <a:spcPct val="115000"/>
-              </a:lnSpc>
-            </a:pPr>
-            <a:r>
-              <a:rPr sz="2200" b="1">
+                <a:spcPct val="135000"/>
+              </a:lnSpc>
+            </a:pPr>
+            <a:r>
+              <a:rPr sz="1000" b="1">
+                <a:solidFill>
+                  <a:srgbClr val="1FA8E0"/>
+                </a:solidFill>
+                <a:latin typeface="Inter"/>
+              </a:rPr>
+              <a:t>▸  </a:t>
+            </a:r>
+            <a:r>
+              <a:rPr sz="1000">
                 <a:solidFill>
                   <a:srgbClr val="E7ECF5"/>
                 </a:solidFill>
                 <a:latin typeface="Inter"/>
               </a:rPr>
-              <a:t>$ —  / month</a:t>
-            </a:r>
-          </a:p>
-        </p:txBody>
-      </p:sp>
-      <p:sp>
-        <p:nvSpPr>
-          <p:cNvPr id="26" name="TextBox 25"/>
-          <p:cNvSpPr txBox="1"/>
-          <p:nvPr/>
-        </p:nvSpPr>
-        <p:spPr>
-          <a:xfrm>
-            <a:off x="8412480" y="4434840"/>
-            <a:ext cx="3108960" cy="274320"/>
-          </a:xfrm>
-          <a:prstGeom prst="rect">
-            <a:avLst/>
-          </a:prstGeom>
-          <a:noFill/>
-        </p:spPr>
-        <p:txBody>
-          <a:bodyPr wrap="square" lIns="0" rIns="0" tIns="0" bIns="0" anchor="t">
-            <a:spAutoFit/>
-          </a:bodyPr>
-          <a:lstStyle/>
-          <a:p>
-            <a:pPr algn="l">
-              <a:lnSpc>
-                <a:spcPct val="115000"/>
-              </a:lnSpc>
-            </a:pPr>
-            <a:r>
-              <a:rPr sz="900" b="0">
-                <a:solidFill>
-                  <a:srgbClr val="6A7895"/>
-                </a:solidFill>
-                <a:latin typeface="Inter"/>
-              </a:rPr>
-              <a:t>edit price in Canva</a:t>
-            </a:r>
-          </a:p>
-        </p:txBody>
-      </p:sp>
-      <p:sp>
-        <p:nvSpPr>
-          <p:cNvPr id="27" name="TextBox 26"/>
-          <p:cNvSpPr txBox="1"/>
-          <p:nvPr/>
-        </p:nvSpPr>
-        <p:spPr>
-          <a:xfrm>
-            <a:off x="8412480" y="4800600"/>
-            <a:ext cx="3108960" cy="1554480"/>
-          </a:xfrm>
-          <a:prstGeom prst="rect">
-            <a:avLst/>
-          </a:prstGeom>
-          <a:noFill/>
-        </p:spPr>
-        <p:txBody>
-          <a:bodyPr wrap="square" lIns="0" rIns="0" tIns="0" bIns="0">
-            <a:spAutoFit/>
-          </a:bodyPr>
-          <a:lstStyle/>
-          <a:p>
-            <a:pPr algn="l">
-              <a:lnSpc>
-                <a:spcPct val="135000"/>
-              </a:lnSpc>
-            </a:pPr>
-            <a:r>
-              <a:rPr sz="1000" b="1">
-                <a:solidFill>
-                  <a:srgbClr val="1FA8E0"/>
-                </a:solidFill>
-                <a:latin typeface="Inter"/>
-              </a:rPr>
-              <a:t>▸  </a:t>
-            </a:r>
-            <a:r>
-              <a:rPr sz="1000">
-                <a:solidFill>
-                  <a:srgbClr val="E7ECF5"/>
-                </a:solidFill>
-                <a:latin typeface="Inter"/>
-              </a:rPr>
-              <a:t>Everything in Single</a:t>
+              <a:t>3 months: $90  (save 25%)</a:t>
             </a:r>
           </a:p>
           <a:p>
@@ -4978,7 +4861,7 @@
                 </a:solidFill>
                 <a:latin typeface="Inter"/>
               </a:rPr>
-              <a:t>12-month access</a:t>
+              <a:t>6 months: $156 (save 35%)</a:t>
             </a:r>
           </a:p>
           <a:p>
@@ -5006,7 +4889,7 @@
                 </a:solidFill>
                 <a:latin typeface="Inter"/>
               </a:rPr>
-              <a:t>Locked-in pricing</a:t>
+              <a:t>All features included</a:t>
             </a:r>
           </a:p>
           <a:p>
@@ -5034,14 +4917,53 @@
                 </a:solidFill>
                 <a:latin typeface="Inter"/>
               </a:rPr>
-              <a:t>Roster archive included</a:t>
-            </a:r>
-          </a:p>
-        </p:txBody>
-      </p:sp>
-      <p:sp>
-        <p:nvSpPr>
-          <p:cNvPr id="28" name="TextBox 27"/>
+              <a:t>Cancel anytime</a:t>
+            </a:r>
+          </a:p>
+        </p:txBody>
+      </p:sp>
+      <p:sp>
+        <p:nvSpPr>
+          <p:cNvPr id="25" name="TextBox 24"/>
+          <p:cNvSpPr txBox="1"/>
+          <p:nvPr/>
+        </p:nvSpPr>
+        <p:spPr>
+          <a:xfrm>
+            <a:off x="548640" y="6446520"/>
+            <a:ext cx="11064240" cy="274320"/>
+          </a:xfrm>
+          <a:prstGeom prst="rect">
+            <a:avLst/>
+          </a:prstGeom>
+          <a:noFill/>
+        </p:spPr>
+        <p:txBody>
+          <a:bodyPr wrap="square" lIns="0" rIns="0" tIns="0" bIns="0" anchor="t">
+            <a:spAutoFit/>
+          </a:bodyPr>
+          <a:lstStyle/>
+          <a:p>
+            <a:pPr algn="ctr">
+              <a:lnSpc>
+                <a:spcPct val="115000"/>
+              </a:lnSpc>
+            </a:pPr>
+            <a:r>
+              <a:rPr sz="1000" b="0">
+                <a:solidFill>
+                  <a:srgbClr val="9AA6C0"/>
+                </a:solidFill>
+                <a:latin typeface="Inter"/>
+              </a:rPr>
+              <a:t>Website-only access (no roster analytics): $40 USD / month flat.</a:t>
+            </a:r>
+          </a:p>
+        </p:txBody>
+      </p:sp>
+      <p:sp>
+        <p:nvSpPr>
+          <p:cNvPr id="26" name="TextBox 25"/>
           <p:cNvSpPr txBox="1"/>
           <p:nvPr/>
         </p:nvSpPr>
@@ -5080,7 +5002,7 @@
       </p:sp>
       <p:sp>
         <p:nvSpPr>
-          <p:cNvPr id="29" name="TextBox 28"/>
+          <p:cNvPr id="27" name="TextBox 26"/>
           <p:cNvSpPr txBox="1"/>
           <p:nvPr/>
         </p:nvSpPr>
